--- a/brand/spark-packaging-client-proposal.pptx
+++ b/brand/spark-packaging-client-proposal.pptx
@@ -113,33 +113,33 @@
   <p:extLst>
     <p:ext uri="{521415D9-36F7-43E2-AB2F-B90AF26B5E84}">
       <p14:sectionLst xmlns:p14="http://schemas.microsoft.com/office/powerpoint/2010/main">
-        <p14:section name="Cover" id="{9e98fe16-7e69-8407-ded6-0dee03441d21}">
+        <p14:section name="Cover" id="{32844474-6ef1-287f-4409-968bd0574840}">
           <p14:sldIdLst>
             <p14:sldId id="256"/>
           </p14:sldIdLst>
         </p14:section>
-        <p14:section name="Understanding" id="{f79064b4-ba05-8faf-587c-38af95545802}">
+        <p14:section name="Understanding" id="{95bb26db-16fa-8db7-3e29-0ec93619c7d2}">
           <p14:sldIdLst>
             <p14:sldId id="257"/>
             <p14:sldId id="258"/>
           </p14:sldIdLst>
         </p14:section>
-        <p14:section name="Approach" id="{6de0d650-b401-37d1-3b27-125502ed6199}">
+        <p14:section name="Approach" id="{25c615ec-a9f3-8beb-b461-92575ce58374}">
           <p14:sldIdLst>
             <p14:sldId id="259"/>
           </p14:sldIdLst>
         </p14:section>
-        <p14:section name="Proof" id="{fe0cc443-95fe-f0e3-154a-5578d3ed2401}">
+        <p14:section name="Proof" id="{0d70e1a6-158d-3054-2786-26218fbc2b61}">
           <p14:sldIdLst>
             <p14:sldId id="260"/>
           </p14:sldIdLst>
         </p14:section>
-        <p14:section name="Commercials" id="{ed7d4f76-692b-de5b-b70f-3a672dce89c5}">
+        <p14:section name="Commercials" id="{732e0596-4822-d802-4600-e6580448007e}">
           <p14:sldIdLst>
             <p14:sldId id="261"/>
           </p14:sldIdLst>
         </p14:section>
-        <p14:section name="Close" id="{903da891-3cd7-c9d6-6d28-6c588c937dd8}">
+        <p14:section name="Close" id="{d1d15f96-a94f-88b3-2252-3819c6795d37}">
           <p14:sldIdLst>
             <p14:sldId id="262"/>
           </p14:sldIdLst>
@@ -1154,7 +1154,7 @@
     <p:bg>
       <p:bgPr>
         <a:solidFill>
-          <a:srgbClr val="3D3D3D"/>
+          <a:srgbClr val="3E3E3E"/>
         </a:solidFill>
       </p:bgPr>
     </p:bg>
@@ -1189,7 +1189,7 @@
         <p:spPr>
           <a:xfrm>
             <a:off x="658368" y="548640"/>
-            <a:ext cx="2299716" cy="726948"/>
+            <a:ext cx="2204618" cy="726948"/>
           </a:xfrm>
           <a:prstGeom prst="rect">
             <a:avLst/>
@@ -1328,7 +1328,7 @@
             <a:avLst/>
           </a:prstGeom>
           <a:solidFill>
-            <a:srgbClr val="FFDD5F"/>
+            <a:srgbClr val="FFDE59"/>
           </a:solidFill>
           <a:ln/>
         </p:spPr>
@@ -1347,7 +1347,7 @@
     <p:bg>
       <p:bgPr>
         <a:solidFill>
-          <a:srgbClr val="3D3D3D"/>
+          <a:srgbClr val="3E3E3E"/>
         </a:solidFill>
       </p:bgPr>
     </p:bg>
@@ -1391,7 +1391,7 @@
               <a:buNone/>
               <a:defRPr lang="en-US" sz="1300" b="1" spc="400" kern="0" dirty="0">
                 <a:solidFill>
-                  <a:srgbClr val="FFDD5F"/>
+                  <a:srgbClr val="FFDE59"/>
                 </a:solidFill>
               </a:defRPr>
             </a:lvl1pPr>
@@ -1460,7 +1460,7 @@
         <p:spPr>
           <a:xfrm>
             <a:off x="10332720" y="5852160"/>
-            <a:ext cx="1298448" cy="410566"/>
+            <a:ext cx="1245413" cy="410566"/>
           </a:xfrm>
           <a:prstGeom prst="rect">
             <a:avLst/>
@@ -1482,7 +1482,7 @@
             <a:avLst/>
           </a:prstGeom>
           <a:solidFill>
-            <a:srgbClr val="FFDD5F"/>
+            <a:srgbClr val="FFDE59"/>
           </a:solidFill>
           <a:ln/>
         </p:spPr>
@@ -1614,7 +1614,7 @@
         <p:spPr>
           <a:xfrm>
             <a:off x="10716768" y="6053328"/>
-            <a:ext cx="948233" cy="299923"/>
+            <a:ext cx="909828" cy="299923"/>
           </a:xfrm>
           <a:prstGeom prst="rect">
             <a:avLst/>
@@ -1748,7 +1748,7 @@
         <p:spPr>
           <a:xfrm>
             <a:off x="10716768" y="6053328"/>
-            <a:ext cx="948233" cy="299923"/>
+            <a:ext cx="909828" cy="299923"/>
           </a:xfrm>
           <a:prstGeom prst="rect">
             <a:avLst/>
@@ -1808,7 +1808,7 @@
     <p:bg>
       <p:bgPr>
         <a:solidFill>
-          <a:srgbClr val="3D3D3D"/>
+          <a:srgbClr val="3E3E3E"/>
         </a:solidFill>
       </p:bgPr>
     </p:bg>
@@ -1852,7 +1852,7 @@
               <a:buNone/>
               <a:defRPr lang="en-US" sz="6000" dirty="0">
                 <a:solidFill>
-                  <a:srgbClr val="FFDD5F"/>
+                  <a:srgbClr val="FFDE59"/>
                 </a:solidFill>
               </a:defRPr>
             </a:lvl1pPr>
@@ -1921,7 +1921,7 @@
         <p:spPr>
           <a:xfrm>
             <a:off x="10332720" y="5760720"/>
-            <a:ext cx="1298448" cy="410566"/>
+            <a:ext cx="1245413" cy="410566"/>
           </a:xfrm>
           <a:prstGeom prst="rect">
             <a:avLst/>
@@ -1943,7 +1943,7 @@
             <a:avLst/>
           </a:prstGeom>
           <a:solidFill>
-            <a:srgbClr val="FFDD5F"/>
+            <a:srgbClr val="FFDE59"/>
           </a:solidFill>
           <a:ln/>
         </p:spPr>
@@ -2423,7 +2423,7 @@
             <a:r>
               <a:rPr lang="en-US" sz="1300" b="1" spc="400" kern="0" dirty="0">
                 <a:solidFill>
-                  <a:srgbClr val="FFDD5F"/>
+                  <a:srgbClr val="FFDE59"/>
                 </a:solidFill>
               </a:rPr>
               <a:t>WHAT WE HEARD</a:t>
@@ -2612,7 +2612,7 @@
             <a:avLst/>
           </a:prstGeom>
           <a:solidFill>
-            <a:srgbClr val="FFDD5F"/>
+            <a:srgbClr val="FFDE59"/>
           </a:solidFill>
           <a:ln/>
         </p:spPr>
@@ -2780,7 +2780,7 @@
             <a:avLst/>
           </a:prstGeom>
           <a:solidFill>
-            <a:srgbClr val="FFDD5F"/>
+            <a:srgbClr val="FFDE59"/>
           </a:solidFill>
           <a:ln/>
         </p:spPr>
@@ -2948,7 +2948,7 @@
             <a:avLst/>
           </a:prstGeom>
           <a:solidFill>
-            <a:srgbClr val="FFDD5F"/>
+            <a:srgbClr val="FFDE59"/>
           </a:solidFill>
           <a:ln/>
         </p:spPr>
@@ -3245,7 +3245,7 @@
             <a:avLst/>
           </a:prstGeom>
           <a:solidFill>
-            <a:srgbClr val="FFDD5F"/>
+            <a:srgbClr val="FFDE59"/>
           </a:solidFill>
           <a:ln/>
         </p:spPr>
@@ -3413,7 +3413,7 @@
             <a:avLst/>
           </a:prstGeom>
           <a:solidFill>
-            <a:srgbClr val="FFDD5F"/>
+            <a:srgbClr val="FFDE59"/>
           </a:solidFill>
           <a:ln/>
         </p:spPr>
@@ -3581,7 +3581,7 @@
             <a:avLst/>
           </a:prstGeom>
           <a:solidFill>
-            <a:srgbClr val="FFDD5F"/>
+            <a:srgbClr val="FFDE59"/>
           </a:solidFill>
           <a:ln/>
         </p:spPr>
@@ -3749,7 +3749,7 @@
             <a:avLst/>
           </a:prstGeom>
           <a:solidFill>
-            <a:srgbClr val="FFDD5F"/>
+            <a:srgbClr val="FFDE59"/>
           </a:solidFill>
           <a:ln/>
         </p:spPr>
@@ -3988,7 +3988,7 @@
             <a:r>
               <a:rPr lang="en-US" sz="7600" dirty="0">
                 <a:solidFill>
-                  <a:srgbClr val="FFDD5F"/>
+                  <a:srgbClr val="FFDE59"/>
                 </a:solidFill>
                 <a:latin typeface="Bebas Neue" pitchFamily="34" charset="0"/>
                 <a:ea typeface="Bebas Neue" pitchFamily="34" charset="-122"/>
@@ -4063,7 +4063,7 @@
             <a:r>
               <a:rPr lang="en-US" sz="7600" dirty="0">
                 <a:solidFill>
-                  <a:srgbClr val="FFDD5F"/>
+                  <a:srgbClr val="FFDE59"/>
                 </a:solidFill>
                 <a:latin typeface="Bebas Neue" pitchFamily="34" charset="0"/>
                 <a:ea typeface="Bebas Neue" pitchFamily="34" charset="-122"/>
@@ -4138,7 +4138,7 @@
             <a:r>
               <a:rPr lang="en-US" sz="7600" dirty="0">
                 <a:solidFill>
-                  <a:srgbClr val="FFDD5F"/>
+                  <a:srgbClr val="FFDE59"/>
                 </a:solidFill>
                 <a:latin typeface="Bebas Neue" pitchFamily="34" charset="0"/>
                 <a:ea typeface="Bebas Neue" pitchFamily="34" charset="-122"/>
@@ -4213,7 +4213,7 @@
             <a:r>
               <a:rPr lang="en-US" sz="7600" dirty="0">
                 <a:solidFill>
-                  <a:srgbClr val="FFDD5F"/>
+                  <a:srgbClr val="FFDE59"/>
                 </a:solidFill>
                 <a:latin typeface="Bebas Neue" pitchFamily="34" charset="0"/>
                 <a:ea typeface="Bebas Neue" pitchFamily="34" charset="-122"/>
@@ -4509,7 +4509,7 @@
                       <a:tailEnd type="none" w="med" len="med"/>
                     </a:lnB>
                     <a:solidFill>
-                      <a:srgbClr val="3D3D3D"/>
+                      <a:srgbClr val="3E3E3E"/>
                     </a:solidFill>
                   </a:tcPr>
                 </a:tc>
@@ -4577,7 +4577,7 @@
                       <a:tailEnd type="none" w="med" len="med"/>
                     </a:lnB>
                     <a:solidFill>
-                      <a:srgbClr val="3D3D3D"/>
+                      <a:srgbClr val="3E3E3E"/>
                     </a:solidFill>
                   </a:tcPr>
                 </a:tc>
@@ -4645,7 +4645,7 @@
                       <a:tailEnd type="none" w="med" len="med"/>
                     </a:lnB>
                     <a:solidFill>
-                      <a:srgbClr val="3D3D3D"/>
+                      <a:srgbClr val="3E3E3E"/>
                     </a:solidFill>
                   </a:tcPr>
                 </a:tc>
@@ -5365,7 +5365,7 @@
             <a:r>
               <a:rPr lang="en-US" sz="6000" dirty="0">
                 <a:solidFill>
-                  <a:srgbClr val="FFDD5F"/>
+                  <a:srgbClr val="FFDE59"/>
                 </a:solidFill>
               </a:rPr>
               <a:t>WHAT HAPPENS NEXT</a:t>
@@ -5425,7 +5425,7 @@
   <a:themeElements>
     <a:clrScheme name="Spark Packaging">
       <a:dk1>
-        <a:srgbClr val="3D3D3D"/>
+        <a:srgbClr val="3E3E3E"/>
       </a:dk1>
       <a:lt1>
         <a:srgbClr val="FFFFFF"/>
@@ -5437,7 +5437,7 @@
         <a:srgbClr val="FAF9F6"/>
       </a:lt2>
       <a:accent1>
-        <a:srgbClr val="FFDD5F"/>
+        <a:srgbClr val="FFDE59"/>
       </a:accent1>
       <a:accent2>
         <a:srgbClr val="FFE98F"/>

--- a/brand/spark-packaging-client-proposal.pptx
+++ b/brand/spark-packaging-client-proposal.pptx
@@ -113,33 +113,33 @@
   <p:extLst>
     <p:ext uri="{521415D9-36F7-43E2-AB2F-B90AF26B5E84}">
       <p14:sectionLst xmlns:p14="http://schemas.microsoft.com/office/powerpoint/2010/main">
-        <p14:section name="Cover" id="{32844474-6ef1-287f-4409-968bd0574840}">
+        <p14:section name="Cover" id="{1f108cc0-ca79-7db1-5846-7e0da6b6ab21}">
           <p14:sldIdLst>
             <p14:sldId id="256"/>
           </p14:sldIdLst>
         </p14:section>
-        <p14:section name="Understanding" id="{95bb26db-16fa-8db7-3e29-0ec93619c7d2}">
+        <p14:section name="Understanding" id="{d2d221c4-8ab5-f6e0-bdc7-9a6ebff0be0c}">
           <p14:sldIdLst>
             <p14:sldId id="257"/>
             <p14:sldId id="258"/>
           </p14:sldIdLst>
         </p14:section>
-        <p14:section name="Approach" id="{25c615ec-a9f3-8beb-b461-92575ce58374}">
+        <p14:section name="Approach" id="{60765752-587c-2fb4-1808-d429ca06abf0}">
           <p14:sldIdLst>
             <p14:sldId id="259"/>
           </p14:sldIdLst>
         </p14:section>
-        <p14:section name="Proof" id="{0d70e1a6-158d-3054-2786-26218fbc2b61}">
+        <p14:section name="Proof" id="{d65c953a-8f5c-6169-69b9-95a736a01704}">
           <p14:sldIdLst>
             <p14:sldId id="260"/>
           </p14:sldIdLst>
         </p14:section>
-        <p14:section name="Commercials" id="{732e0596-4822-d802-4600-e6580448007e}">
+        <p14:section name="Commercials" id="{34429158-726f-d5ac-bf7f-8ba6aeac10b9}">
           <p14:sldIdLst>
             <p14:sldId id="261"/>
           </p14:sldIdLst>
         </p14:section>
-        <p14:section name="Close" id="{d1d15f96-a94f-88b3-2252-3819c6795d37}">
+        <p14:section name="Close" id="{4e111b27-c058-be0f-6189-cf00161de4de}">
           <p14:sldIdLst>
             <p14:sldId id="262"/>
           </p14:sldIdLst>
@@ -2725,7 +2725,7 @@
                   <a:srgbClr val="6F6A5D"/>
                 </a:solidFill>
               </a:rPr>
-              <a:t>Say it back in their words. If they do not recognise it, the rest of the deck does not land.</a:t>
+              <a:t>Say it back in their words. If they do not recognize it, the rest of the deck does not land.</a:t>
             </a:r>
             <a:endParaRPr lang="en-US" sz="1250" dirty="0"/>
           </a:p>
